--- a/src/backend/bisheng/linsight/builtin_skills/bisheng-pptx/templates/gov-red/template.pptx
+++ b/src/backend/bisheng/linsight/builtin_skills/bisheng-pptx/templates/gov-red/template.pptx
@@ -2066,8 +2066,8 @@
         </p:nvSpPr>
         <p:spPr>
           <a:xfrm>
-            <a:off x="7620000" y="508000"/>
-            <a:ext cx="5842000" cy="5842000"/>
+            <a:off x="6858000" y="457200"/>
+            <a:ext cx="5080000" cy="5080000"/>
           </a:xfrm>
           <a:prstGeom prst="ellipse">
             <a:avLst/>
@@ -2108,8 +2108,8 @@
         </p:nvSpPr>
         <p:spPr>
           <a:xfrm>
-            <a:off x="8763000" y="1651000"/>
-            <a:ext cx="3556000" cy="3556000"/>
+            <a:off x="7874000" y="1473200"/>
+            <a:ext cx="3048000" cy="3048000"/>
           </a:xfrm>
           <a:prstGeom prst="ellipse">
             <a:avLst/>
@@ -2170,7 +2170,7 @@
               </a:lnSpc>
             </a:pPr>
             <a:r>
-              <a:rPr sz="1400" b="1">
+              <a:rPr sz="1300" b="1">
                 <a:solidFill>
                   <a:srgbClr val="C9A84C"/>
                 </a:solidFill>
@@ -2210,7 +2210,7 @@
               </a:lnSpc>
             </a:pPr>
             <a:r>
-              <a:rPr sz="4000" b="1">
+              <a:rPr sz="4400" b="1">
                 <a:solidFill>
                   <a:srgbClr val="FFFFFF"/>
                 </a:solidFill>
@@ -2332,7 +2332,7 @@
               </a:lnSpc>
             </a:pPr>
             <a:r>
-              <a:rPr sz="1500" b="1">
+              <a:rPr sz="1400" b="1">
                 <a:solidFill>
                   <a:srgbClr val="8B1A2B"/>
                 </a:solidFill>
@@ -2372,7 +2372,7 @@
               </a:lnSpc>
             </a:pPr>
             <a:r>
-              <a:rPr sz="1400" b="0">
+              <a:rPr sz="1300" b="0">
                 <a:solidFill>
                   <a:srgbClr val="8B1A2B"/>
                 </a:solidFill>
@@ -2540,8 +2540,8 @@
         </p:nvSpPr>
         <p:spPr>
           <a:xfrm>
-            <a:off x="609600" y="6477000"/>
-            <a:ext cx="7112000" cy="177800"/>
+            <a:off x="609600" y="6273800"/>
+            <a:ext cx="7112000" cy="203200"/>
           </a:xfrm>
           <a:prstGeom prst="rect">
             <a:avLst/>
@@ -2560,7 +2560,7 @@
               </a:lnSpc>
             </a:pPr>
             <a:r>
-              <a:rPr sz="900" b="0">
+              <a:rPr sz="1000" b="0">
                 <a:solidFill>
                   <a:srgbClr val="6B6B6B"/>
                 </a:solidFill>
@@ -2580,7 +2580,7 @@
         </p:nvSpPr>
         <p:spPr>
           <a:xfrm>
-            <a:off x="10820400" y="6451600"/>
+            <a:off x="10820400" y="6248400"/>
             <a:ext cx="762000" cy="203200"/>
           </a:xfrm>
           <a:prstGeom prst="rect">
@@ -2589,13 +2589,15 @@
           <a:noFill/>
         </p:spPr>
         <p:txBody>
-          <a:bodyPr wrap="none" lIns="0" rIns="0" tIns="0" bIns="0">
-            <a:spAutoFit/>
-          </a:bodyPr>
-          <a:lstStyle/>
-          <a:p>
-            <a:pPr algn="r"/>
-            <a:fld id="{C8EC9EC3-1407-4411-8B45-C9821CDCCF28}" type="slidenum">
+          <a:bodyPr wrap="square" lIns="0" rIns="0" tIns="0" bIns="0">
+            <a:noAutofit/>
+          </a:bodyPr>
+          <a:lstStyle/>
+          <a:p>
+            <a:pPr algn="r">
+              <a:defRPr sz="1000"/>
+            </a:pPr>
+            <a:fld id="{EE961F01-0033-51A5-9400-102DDB535032}" type="slidenum">
               <a:rPr lang="zh-CN" sz="1000">
                 <a:solidFill>
                   <a:srgbClr val="6B6B6B"/>
@@ -3285,8 +3287,8 @@
         </p:nvSpPr>
         <p:spPr>
           <a:xfrm>
-            <a:off x="609600" y="6477000"/>
-            <a:ext cx="7112000" cy="177800"/>
+            <a:off x="609600" y="6273800"/>
+            <a:ext cx="7112000" cy="203200"/>
           </a:xfrm>
           <a:prstGeom prst="rect">
             <a:avLst/>
@@ -3305,7 +3307,7 @@
               </a:lnSpc>
             </a:pPr>
             <a:r>
-              <a:rPr sz="900" b="0">
+              <a:rPr sz="1000" b="0">
                 <a:solidFill>
                   <a:srgbClr val="6B6B6B"/>
                 </a:solidFill>
@@ -3325,7 +3327,7 @@
         </p:nvSpPr>
         <p:spPr>
           <a:xfrm>
-            <a:off x="10820400" y="6451600"/>
+            <a:off x="10820400" y="6248400"/>
             <a:ext cx="762000" cy="203200"/>
           </a:xfrm>
           <a:prstGeom prst="rect">
@@ -3334,13 +3336,15 @@
           <a:noFill/>
         </p:spPr>
         <p:txBody>
-          <a:bodyPr wrap="none" lIns="0" rIns="0" tIns="0" bIns="0">
-            <a:spAutoFit/>
-          </a:bodyPr>
-          <a:lstStyle/>
-          <a:p>
-            <a:pPr algn="r"/>
-            <a:fld id="{60384FFD-E869-48B4-8304-C8058E0C0B95}" type="slidenum">
+          <a:bodyPr wrap="square" lIns="0" rIns="0" tIns="0" bIns="0">
+            <a:noAutofit/>
+          </a:bodyPr>
+          <a:lstStyle/>
+          <a:p>
+            <a:pPr algn="r">
+              <a:defRPr sz="1000"/>
+            </a:pPr>
+            <a:fld id="{A09B69B4-13F1-5435-8235-A60129D5357D}" type="slidenum">
               <a:rPr lang="zh-CN" sz="1000">
                 <a:solidFill>
                   <a:srgbClr val="6B6B6B"/>
@@ -4429,8 +4433,8 @@
         </p:nvSpPr>
         <p:spPr>
           <a:xfrm>
-            <a:off x="609600" y="6477000"/>
-            <a:ext cx="7112000" cy="177800"/>
+            <a:off x="609600" y="6273800"/>
+            <a:ext cx="7112000" cy="203200"/>
           </a:xfrm>
           <a:prstGeom prst="rect">
             <a:avLst/>
@@ -4449,7 +4453,7 @@
               </a:lnSpc>
             </a:pPr>
             <a:r>
-              <a:rPr sz="900" b="0">
+              <a:rPr sz="1000" b="0">
                 <a:solidFill>
                   <a:srgbClr val="6B6B6B"/>
                 </a:solidFill>
@@ -4469,7 +4473,7 @@
         </p:nvSpPr>
         <p:spPr>
           <a:xfrm>
-            <a:off x="10820400" y="6451600"/>
+            <a:off x="10820400" y="6248400"/>
             <a:ext cx="762000" cy="203200"/>
           </a:xfrm>
           <a:prstGeom prst="rect">
@@ -4478,13 +4482,15 @@
           <a:noFill/>
         </p:spPr>
         <p:txBody>
-          <a:bodyPr wrap="none" lIns="0" rIns="0" tIns="0" bIns="0">
-            <a:spAutoFit/>
-          </a:bodyPr>
-          <a:lstStyle/>
-          <a:p>
-            <a:pPr algn="r"/>
-            <a:fld id="{1C11B6AA-39D1-411E-A02D-D1BAA3073746}" type="slidenum">
+          <a:bodyPr wrap="square" lIns="0" rIns="0" tIns="0" bIns="0">
+            <a:noAutofit/>
+          </a:bodyPr>
+          <a:lstStyle/>
+          <a:p>
+            <a:pPr algn="r">
+              <a:defRPr sz="1000"/>
+            </a:pPr>
+            <a:fld id="{7904B3E3-99C9-5874-B64E-21A24746328C}" type="slidenum">
               <a:rPr lang="zh-CN" sz="1000">
                 <a:solidFill>
                   <a:srgbClr val="6B6B6B"/>
@@ -5497,8 +5503,8 @@
         </p:nvSpPr>
         <p:spPr>
           <a:xfrm>
-            <a:off x="609600" y="6477000"/>
-            <a:ext cx="7112000" cy="177800"/>
+            <a:off x="609600" y="6273800"/>
+            <a:ext cx="7112000" cy="203200"/>
           </a:xfrm>
           <a:prstGeom prst="rect">
             <a:avLst/>
@@ -5517,7 +5523,7 @@
               </a:lnSpc>
             </a:pPr>
             <a:r>
-              <a:rPr sz="900" b="0">
+              <a:rPr sz="1000" b="0">
                 <a:solidFill>
                   <a:srgbClr val="6B6B6B"/>
                 </a:solidFill>
@@ -5537,7 +5543,7 @@
         </p:nvSpPr>
         <p:spPr>
           <a:xfrm>
-            <a:off x="10820400" y="6451600"/>
+            <a:off x="10820400" y="6248400"/>
             <a:ext cx="762000" cy="203200"/>
           </a:xfrm>
           <a:prstGeom prst="rect">
@@ -5546,13 +5552,15 @@
           <a:noFill/>
         </p:spPr>
         <p:txBody>
-          <a:bodyPr wrap="none" lIns="0" rIns="0" tIns="0" bIns="0">
-            <a:spAutoFit/>
-          </a:bodyPr>
-          <a:lstStyle/>
-          <a:p>
-            <a:pPr algn="r"/>
-            <a:fld id="{2BBC50DA-01C8-4383-9493-3B1F4322DD88}" type="slidenum">
+          <a:bodyPr wrap="square" lIns="0" rIns="0" tIns="0" bIns="0">
+            <a:noAutofit/>
+          </a:bodyPr>
+          <a:lstStyle/>
+          <a:p>
+            <a:pPr algn="r">
+              <a:defRPr sz="1000"/>
+            </a:pPr>
+            <a:fld id="{B03037FE-F689-54BA-B840-8E5F678568DA}" type="slidenum">
               <a:rPr lang="zh-CN" sz="1000">
                 <a:solidFill>
                   <a:srgbClr val="6B6B6B"/>
@@ -6482,8 +6490,8 @@
         </p:nvSpPr>
         <p:spPr>
           <a:xfrm>
-            <a:off x="609600" y="6477000"/>
-            <a:ext cx="7112000" cy="177800"/>
+            <a:off x="609600" y="6273800"/>
+            <a:ext cx="7112000" cy="203200"/>
           </a:xfrm>
           <a:prstGeom prst="rect">
             <a:avLst/>
@@ -6502,7 +6510,7 @@
               </a:lnSpc>
             </a:pPr>
             <a:r>
-              <a:rPr sz="900" b="0">
+              <a:rPr sz="1000" b="0">
                 <a:solidFill>
                   <a:srgbClr val="6B6B6B"/>
                 </a:solidFill>
@@ -6522,7 +6530,7 @@
         </p:nvSpPr>
         <p:spPr>
           <a:xfrm>
-            <a:off x="10820400" y="6451600"/>
+            <a:off x="10820400" y="6248400"/>
             <a:ext cx="762000" cy="203200"/>
           </a:xfrm>
           <a:prstGeom prst="rect">
@@ -6531,13 +6539,15 @@
           <a:noFill/>
         </p:spPr>
         <p:txBody>
-          <a:bodyPr wrap="none" lIns="0" rIns="0" tIns="0" bIns="0">
-            <a:spAutoFit/>
-          </a:bodyPr>
-          <a:lstStyle/>
-          <a:p>
-            <a:pPr algn="r"/>
-            <a:fld id="{47357A81-C7FF-453D-9DEA-F258AF1B82F7}" type="slidenum">
+          <a:bodyPr wrap="square" lIns="0" rIns="0" tIns="0" bIns="0">
+            <a:noAutofit/>
+          </a:bodyPr>
+          <a:lstStyle/>
+          <a:p>
+            <a:pPr algn="r">
+              <a:defRPr sz="1000"/>
+            </a:pPr>
+            <a:fld id="{B217760B-CC2A-5CC8-B384-EC7168CE75E4}" type="slidenum">
               <a:rPr lang="zh-CN" sz="1000">
                 <a:solidFill>
                   <a:srgbClr val="6B6B6B"/>
@@ -7807,8 +7817,8 @@
         </p:nvSpPr>
         <p:spPr>
           <a:xfrm>
-            <a:off x="7620000" y="508000"/>
-            <a:ext cx="5842000" cy="5842000"/>
+            <a:off x="6858000" y="457200"/>
+            <a:ext cx="5080000" cy="5080000"/>
           </a:xfrm>
           <a:prstGeom prst="ellipse">
             <a:avLst/>
@@ -7849,8 +7859,8 @@
         </p:nvSpPr>
         <p:spPr>
           <a:xfrm>
-            <a:off x="8763000" y="1651000"/>
-            <a:ext cx="3556000" cy="3556000"/>
+            <a:off x="7874000" y="1473200"/>
+            <a:ext cx="3048000" cy="3048000"/>
           </a:xfrm>
           <a:prstGeom prst="ellipse">
             <a:avLst/>
@@ -8692,8 +8702,8 @@
         </p:nvSpPr>
         <p:spPr>
           <a:xfrm>
-            <a:off x="609600" y="6477000"/>
-            <a:ext cx="7112000" cy="177800"/>
+            <a:off x="609600" y="6273800"/>
+            <a:ext cx="7112000" cy="203200"/>
           </a:xfrm>
           <a:prstGeom prst="rect">
             <a:avLst/>
@@ -8712,7 +8722,7 @@
               </a:lnSpc>
             </a:pPr>
             <a:r>
-              <a:rPr sz="900" b="0">
+              <a:rPr sz="1000" b="0">
                 <a:solidFill>
                   <a:srgbClr val="6B6B6B"/>
                 </a:solidFill>
@@ -8732,7 +8742,7 @@
         </p:nvSpPr>
         <p:spPr>
           <a:xfrm>
-            <a:off x="10820400" y="6451600"/>
+            <a:off x="10820400" y="6248400"/>
             <a:ext cx="762000" cy="203200"/>
           </a:xfrm>
           <a:prstGeom prst="rect">
@@ -8741,13 +8751,15 @@
           <a:noFill/>
         </p:spPr>
         <p:txBody>
-          <a:bodyPr wrap="none" lIns="0" rIns="0" tIns="0" bIns="0">
-            <a:spAutoFit/>
-          </a:bodyPr>
-          <a:lstStyle/>
-          <a:p>
-            <a:pPr algn="r"/>
-            <a:fld id="{AB97791B-7EAA-4342-9113-058E0945C9C6}" type="slidenum">
+          <a:bodyPr wrap="square" lIns="0" rIns="0" tIns="0" bIns="0">
+            <a:noAutofit/>
+          </a:bodyPr>
+          <a:lstStyle/>
+          <a:p>
+            <a:pPr algn="r">
+              <a:defRPr sz="1000"/>
+            </a:pPr>
+            <a:fld id="{3AEF6613-A19C-5D0A-9B2B-52A6A0F70223}" type="slidenum">
               <a:rPr lang="zh-CN" sz="1000">
                 <a:solidFill>
                   <a:srgbClr val="6B6B6B"/>
@@ -8793,8 +8805,8 @@
         </p:nvSpPr>
         <p:spPr>
           <a:xfrm>
-            <a:off x="7620000" y="508000"/>
-            <a:ext cx="5842000" cy="5842000"/>
+            <a:off x="6858000" y="457200"/>
+            <a:ext cx="5080000" cy="5080000"/>
           </a:xfrm>
           <a:prstGeom prst="ellipse">
             <a:avLst/>
@@ -8835,8 +8847,8 @@
         </p:nvSpPr>
         <p:spPr>
           <a:xfrm>
-            <a:off x="8763000" y="1651000"/>
-            <a:ext cx="3556000" cy="3556000"/>
+            <a:off x="7874000" y="1473200"/>
+            <a:ext cx="3048000" cy="3048000"/>
           </a:xfrm>
           <a:prstGeom prst="ellipse">
             <a:avLst/>
@@ -8997,8 +9009,8 @@
         </p:nvSpPr>
         <p:spPr>
           <a:xfrm>
-            <a:off x="609600" y="6477000"/>
-            <a:ext cx="7112000" cy="177800"/>
+            <a:off x="609600" y="6273800"/>
+            <a:ext cx="7112000" cy="203200"/>
           </a:xfrm>
           <a:prstGeom prst="rect">
             <a:avLst/>
@@ -9017,7 +9029,7 @@
               </a:lnSpc>
             </a:pPr>
             <a:r>
-              <a:rPr sz="900" b="0">
+              <a:rPr sz="1000" b="0">
                 <a:solidFill>
                   <a:srgbClr val="F0D9B5"/>
                 </a:solidFill>
@@ -9037,7 +9049,7 @@
         </p:nvSpPr>
         <p:spPr>
           <a:xfrm>
-            <a:off x="10820400" y="6451600"/>
+            <a:off x="10820400" y="6248400"/>
             <a:ext cx="762000" cy="203200"/>
           </a:xfrm>
           <a:prstGeom prst="rect">
@@ -9046,13 +9058,15 @@
           <a:noFill/>
         </p:spPr>
         <p:txBody>
-          <a:bodyPr wrap="none" lIns="0" rIns="0" tIns="0" bIns="0">
-            <a:spAutoFit/>
-          </a:bodyPr>
-          <a:lstStyle/>
-          <a:p>
-            <a:pPr algn="r"/>
-            <a:fld id="{28BA52B8-0497-461C-A68F-835C01741B91}" type="slidenum">
+          <a:bodyPr wrap="square" lIns="0" rIns="0" tIns="0" bIns="0">
+            <a:noAutofit/>
+          </a:bodyPr>
+          <a:lstStyle/>
+          <a:p>
+            <a:pPr algn="r">
+              <a:defRPr sz="1000"/>
+            </a:pPr>
+            <a:fld id="{D887D9B9-1A0E-5E69-AEF4-07EB6219CC61}" type="slidenum">
               <a:rPr lang="zh-CN" sz="1000">
                 <a:solidFill>
                   <a:srgbClr val="F0D9B5"/>
@@ -9138,8 +9152,8 @@
         </p:nvSpPr>
         <p:spPr>
           <a:xfrm>
-            <a:off x="609600" y="6477000"/>
-            <a:ext cx="7112000" cy="177800"/>
+            <a:off x="609600" y="6273800"/>
+            <a:ext cx="7112000" cy="203200"/>
           </a:xfrm>
           <a:prstGeom prst="rect">
             <a:avLst/>
@@ -9158,7 +9172,7 @@
               </a:lnSpc>
             </a:pPr>
             <a:r>
-              <a:rPr sz="900" b="0">
+              <a:rPr sz="1000" b="0">
                 <a:solidFill>
                   <a:srgbClr val="6B6B6B"/>
                 </a:solidFill>
@@ -9178,7 +9192,7 @@
         </p:nvSpPr>
         <p:spPr>
           <a:xfrm>
-            <a:off x="10820400" y="6451600"/>
+            <a:off x="10820400" y="6248400"/>
             <a:ext cx="762000" cy="203200"/>
           </a:xfrm>
           <a:prstGeom prst="rect">
@@ -9187,13 +9201,15 @@
           <a:noFill/>
         </p:spPr>
         <p:txBody>
-          <a:bodyPr wrap="none" lIns="0" rIns="0" tIns="0" bIns="0">
-            <a:spAutoFit/>
-          </a:bodyPr>
-          <a:lstStyle/>
-          <a:p>
-            <a:pPr algn="r"/>
-            <a:fld id="{FBA6150E-CA0D-40E3-B133-39B4A6D25088}" type="slidenum">
+          <a:bodyPr wrap="square" lIns="0" rIns="0" tIns="0" bIns="0">
+            <a:noAutofit/>
+          </a:bodyPr>
+          <a:lstStyle/>
+          <a:p>
+            <a:pPr algn="r">
+              <a:defRPr sz="1000"/>
+            </a:pPr>
+            <a:fld id="{9FF07212-5E86-54A6-8D9B-E91040569310}" type="slidenum">
               <a:rPr lang="zh-CN" sz="1000">
                 <a:solidFill>
                   <a:srgbClr val="6B6B6B"/>
@@ -9523,8 +9539,8 @@
         </p:nvSpPr>
         <p:spPr>
           <a:xfrm>
-            <a:off x="609600" y="6477000"/>
-            <a:ext cx="7112000" cy="177800"/>
+            <a:off x="609600" y="6273800"/>
+            <a:ext cx="7112000" cy="203200"/>
           </a:xfrm>
           <a:prstGeom prst="rect">
             <a:avLst/>
@@ -9543,7 +9559,7 @@
               </a:lnSpc>
             </a:pPr>
             <a:r>
-              <a:rPr sz="900" b="0">
+              <a:rPr sz="1000" b="0">
                 <a:solidFill>
                   <a:srgbClr val="6B6B6B"/>
                 </a:solidFill>
@@ -9563,7 +9579,7 @@
         </p:nvSpPr>
         <p:spPr>
           <a:xfrm>
-            <a:off x="10820400" y="6451600"/>
+            <a:off x="10820400" y="6248400"/>
             <a:ext cx="762000" cy="203200"/>
           </a:xfrm>
           <a:prstGeom prst="rect">
@@ -9572,13 +9588,15 @@
           <a:noFill/>
         </p:spPr>
         <p:txBody>
-          <a:bodyPr wrap="none" lIns="0" rIns="0" tIns="0" bIns="0">
-            <a:spAutoFit/>
-          </a:bodyPr>
-          <a:lstStyle/>
-          <a:p>
-            <a:pPr algn="r"/>
-            <a:fld id="{BF24F93F-98D5-4315-A71C-DABB77583B8C}" type="slidenum">
+          <a:bodyPr wrap="square" lIns="0" rIns="0" tIns="0" bIns="0">
+            <a:noAutofit/>
+          </a:bodyPr>
+          <a:lstStyle/>
+          <a:p>
+            <a:pPr algn="r">
+              <a:defRPr sz="1000"/>
+            </a:pPr>
+            <a:fld id="{BAD348B4-D482-5C6B-B216-D150C16A7C14}" type="slidenum">
               <a:rPr lang="zh-CN" sz="1000">
                 <a:solidFill>
                   <a:srgbClr val="6B6B6B"/>
@@ -9963,8 +9981,8 @@
         </p:nvSpPr>
         <p:spPr>
           <a:xfrm>
-            <a:off x="609600" y="6477000"/>
-            <a:ext cx="7112000" cy="177800"/>
+            <a:off x="609600" y="6273800"/>
+            <a:ext cx="7112000" cy="203200"/>
           </a:xfrm>
           <a:prstGeom prst="rect">
             <a:avLst/>
@@ -9983,7 +10001,7 @@
               </a:lnSpc>
             </a:pPr>
             <a:r>
-              <a:rPr sz="900" b="0">
+              <a:rPr sz="1000" b="0">
                 <a:solidFill>
                   <a:srgbClr val="6B6B6B"/>
                 </a:solidFill>
@@ -10003,7 +10021,7 @@
         </p:nvSpPr>
         <p:spPr>
           <a:xfrm>
-            <a:off x="10820400" y="6451600"/>
+            <a:off x="10820400" y="6248400"/>
             <a:ext cx="762000" cy="203200"/>
           </a:xfrm>
           <a:prstGeom prst="rect">
@@ -10012,13 +10030,15 @@
           <a:noFill/>
         </p:spPr>
         <p:txBody>
-          <a:bodyPr wrap="none" lIns="0" rIns="0" tIns="0" bIns="0">
-            <a:spAutoFit/>
-          </a:bodyPr>
-          <a:lstStyle/>
-          <a:p>
-            <a:pPr algn="r"/>
-            <a:fld id="{0EF4635C-C92B-40A4-A8FC-EA31AAD576D5}" type="slidenum">
+          <a:bodyPr wrap="square" lIns="0" rIns="0" tIns="0" bIns="0">
+            <a:noAutofit/>
+          </a:bodyPr>
+          <a:lstStyle/>
+          <a:p>
+            <a:pPr algn="r">
+              <a:defRPr sz="1000"/>
+            </a:pPr>
+            <a:fld id="{EBE5A372-31F2-5C03-910E-FA360429F541}" type="slidenum">
               <a:rPr lang="zh-CN" sz="1000">
                 <a:solidFill>
                   <a:srgbClr val="6B6B6B"/>
@@ -10712,8 +10732,8 @@
         </p:nvSpPr>
         <p:spPr>
           <a:xfrm>
-            <a:off x="609600" y="6477000"/>
-            <a:ext cx="7112000" cy="177800"/>
+            <a:off x="609600" y="6273800"/>
+            <a:ext cx="7112000" cy="203200"/>
           </a:xfrm>
           <a:prstGeom prst="rect">
             <a:avLst/>
@@ -10732,7 +10752,7 @@
               </a:lnSpc>
             </a:pPr>
             <a:r>
-              <a:rPr sz="900" b="0">
+              <a:rPr sz="1000" b="0">
                 <a:solidFill>
                   <a:srgbClr val="6B6B6B"/>
                 </a:solidFill>
@@ -10752,7 +10772,7 @@
         </p:nvSpPr>
         <p:spPr>
           <a:xfrm>
-            <a:off x="10820400" y="6451600"/>
+            <a:off x="10820400" y="6248400"/>
             <a:ext cx="762000" cy="203200"/>
           </a:xfrm>
           <a:prstGeom prst="rect">
@@ -10761,13 +10781,15 @@
           <a:noFill/>
         </p:spPr>
         <p:txBody>
-          <a:bodyPr wrap="none" lIns="0" rIns="0" tIns="0" bIns="0">
-            <a:spAutoFit/>
-          </a:bodyPr>
-          <a:lstStyle/>
-          <a:p>
-            <a:pPr algn="r"/>
-            <a:fld id="{E161587C-2C09-4515-9460-A2F8F9F0B8D4}" type="slidenum">
+          <a:bodyPr wrap="square" lIns="0" rIns="0" tIns="0" bIns="0">
+            <a:noAutofit/>
+          </a:bodyPr>
+          <a:lstStyle/>
+          <a:p>
+            <a:pPr algn="r">
+              <a:defRPr sz="1000"/>
+            </a:pPr>
+            <a:fld id="{BF3FF314-EB09-5DCB-A5FB-356FA35A9976}" type="slidenum">
               <a:rPr lang="zh-CN" sz="1000">
                 <a:solidFill>
                   <a:srgbClr val="6B6B6B"/>
@@ -11583,8 +11605,8 @@
         </p:nvSpPr>
         <p:spPr>
           <a:xfrm>
-            <a:off x="609600" y="6477000"/>
-            <a:ext cx="7112000" cy="177800"/>
+            <a:off x="609600" y="6273800"/>
+            <a:ext cx="7112000" cy="203200"/>
           </a:xfrm>
           <a:prstGeom prst="rect">
             <a:avLst/>
@@ -11603,7 +11625,7 @@
               </a:lnSpc>
             </a:pPr>
             <a:r>
-              <a:rPr sz="900" b="0">
+              <a:rPr sz="1000" b="0">
                 <a:solidFill>
                   <a:srgbClr val="6B6B6B"/>
                 </a:solidFill>
@@ -11623,7 +11645,7 @@
         </p:nvSpPr>
         <p:spPr>
           <a:xfrm>
-            <a:off x="10820400" y="6451600"/>
+            <a:off x="10820400" y="6248400"/>
             <a:ext cx="762000" cy="203200"/>
           </a:xfrm>
           <a:prstGeom prst="rect">
@@ -11632,13 +11654,15 @@
           <a:noFill/>
         </p:spPr>
         <p:txBody>
-          <a:bodyPr wrap="none" lIns="0" rIns="0" tIns="0" bIns="0">
-            <a:spAutoFit/>
-          </a:bodyPr>
-          <a:lstStyle/>
-          <a:p>
-            <a:pPr algn="r"/>
-            <a:fld id="{9089B26F-00C1-466E-8C8E-3545042AD0F1}" type="slidenum">
+          <a:bodyPr wrap="square" lIns="0" rIns="0" tIns="0" bIns="0">
+            <a:noAutofit/>
+          </a:bodyPr>
+          <a:lstStyle/>
+          <a:p>
+            <a:pPr algn="r">
+              <a:defRPr sz="1000"/>
+            </a:pPr>
+            <a:fld id="{8C5906EF-027D-5F88-B1CC-F8CAD78E28C8}" type="slidenum">
               <a:rPr lang="zh-CN" sz="1000">
                 <a:solidFill>
                   <a:srgbClr val="6B6B6B"/>
@@ -12673,8 +12697,8 @@
         </p:nvSpPr>
         <p:spPr>
           <a:xfrm>
-            <a:off x="609600" y="6477000"/>
-            <a:ext cx="7112000" cy="177800"/>
+            <a:off x="609600" y="6273800"/>
+            <a:ext cx="7112000" cy="203200"/>
           </a:xfrm>
           <a:prstGeom prst="rect">
             <a:avLst/>
@@ -12693,7 +12717,7 @@
               </a:lnSpc>
             </a:pPr>
             <a:r>
-              <a:rPr sz="900" b="0">
+              <a:rPr sz="1000" b="0">
                 <a:solidFill>
                   <a:srgbClr val="6B6B6B"/>
                 </a:solidFill>
@@ -12713,7 +12737,7 @@
         </p:nvSpPr>
         <p:spPr>
           <a:xfrm>
-            <a:off x="10820400" y="6451600"/>
+            <a:off x="10820400" y="6248400"/>
             <a:ext cx="762000" cy="203200"/>
           </a:xfrm>
           <a:prstGeom prst="rect">
@@ -12722,13 +12746,15 @@
           <a:noFill/>
         </p:spPr>
         <p:txBody>
-          <a:bodyPr wrap="none" lIns="0" rIns="0" tIns="0" bIns="0">
-            <a:spAutoFit/>
-          </a:bodyPr>
-          <a:lstStyle/>
-          <a:p>
-            <a:pPr algn="r"/>
-            <a:fld id="{934258E2-2E96-4233-AE7E-5D673B6851B6}" type="slidenum">
+          <a:bodyPr wrap="square" lIns="0" rIns="0" tIns="0" bIns="0">
+            <a:noAutofit/>
+          </a:bodyPr>
+          <a:lstStyle/>
+          <a:p>
+            <a:pPr algn="r">
+              <a:defRPr sz="1000"/>
+            </a:pPr>
+            <a:fld id="{916687DC-96ED-51FC-86FD-3B008C08AEE6}" type="slidenum">
               <a:rPr lang="zh-CN" sz="1000">
                 <a:solidFill>
                   <a:srgbClr val="6B6B6B"/>

--- a/src/backend/bisheng/linsight/builtin_skills/bisheng-pptx/templates/gov-red/template.pptx
+++ b/src/backend/bisheng/linsight/builtin_skills/bisheng-pptx/templates/gov-red/template.pptx
@@ -2066,8 +2066,8 @@
         </p:nvSpPr>
         <p:spPr>
           <a:xfrm>
-            <a:off x="6858000" y="457200"/>
-            <a:ext cx="5080000" cy="5080000"/>
+            <a:off x="7366000" y="635000"/>
+            <a:ext cx="4572000" cy="4572000"/>
           </a:xfrm>
           <a:prstGeom prst="ellipse">
             <a:avLst/>
@@ -2108,8 +2108,8 @@
         </p:nvSpPr>
         <p:spPr>
           <a:xfrm>
-            <a:off x="7874000" y="1473200"/>
-            <a:ext cx="3048000" cy="3048000"/>
+            <a:off x="8255000" y="1524000"/>
+            <a:ext cx="2794000" cy="2794000"/>
           </a:xfrm>
           <a:prstGeom prst="ellipse">
             <a:avLst/>
@@ -2151,7 +2151,7 @@
         <p:spPr>
           <a:xfrm>
             <a:off x="914400" y="1498600"/>
-            <a:ext cx="6604000" cy="254000"/>
+            <a:ext cx="6096000" cy="254000"/>
           </a:xfrm>
           <a:prstGeom prst="rect">
             <a:avLst/>
@@ -2191,7 +2191,7 @@
         <p:spPr>
           <a:xfrm>
             <a:off x="914400" y="2057400"/>
-            <a:ext cx="6604000" cy="1651000"/>
+            <a:ext cx="6096000" cy="1651000"/>
           </a:xfrm>
           <a:prstGeom prst="rect">
             <a:avLst/>
@@ -2231,7 +2231,7 @@
         <p:spPr>
           <a:xfrm>
             <a:off x="914400" y="3886200"/>
-            <a:ext cx="6604000" cy="660400"/>
+            <a:ext cx="6096000" cy="660400"/>
           </a:xfrm>
           <a:prstGeom prst="rect">
             <a:avLst/>
@@ -7817,8 +7817,8 @@
         </p:nvSpPr>
         <p:spPr>
           <a:xfrm>
-            <a:off x="6858000" y="457200"/>
-            <a:ext cx="5080000" cy="5080000"/>
+            <a:off x="7366000" y="635000"/>
+            <a:ext cx="4572000" cy="4572000"/>
           </a:xfrm>
           <a:prstGeom prst="ellipse">
             <a:avLst/>
@@ -7859,8 +7859,8 @@
         </p:nvSpPr>
         <p:spPr>
           <a:xfrm>
-            <a:off x="7874000" y="1473200"/>
-            <a:ext cx="3048000" cy="3048000"/>
+            <a:off x="8255000" y="1524000"/>
+            <a:ext cx="2794000" cy="2794000"/>
           </a:xfrm>
           <a:prstGeom prst="ellipse">
             <a:avLst/>
@@ -8805,8 +8805,8 @@
         </p:nvSpPr>
         <p:spPr>
           <a:xfrm>
-            <a:off x="6858000" y="457200"/>
-            <a:ext cx="5080000" cy="5080000"/>
+            <a:off x="7366000" y="635000"/>
+            <a:ext cx="4572000" cy="4572000"/>
           </a:xfrm>
           <a:prstGeom prst="ellipse">
             <a:avLst/>
@@ -8847,8 +8847,8 @@
         </p:nvSpPr>
         <p:spPr>
           <a:xfrm>
-            <a:off x="7874000" y="1473200"/>
-            <a:ext cx="3048000" cy="3048000"/>
+            <a:off x="8255000" y="1524000"/>
+            <a:ext cx="2794000" cy="2794000"/>
           </a:xfrm>
           <a:prstGeom prst="ellipse">
             <a:avLst/>
